--- a/examples/out/tech-route.pptx
+++ b/examples/out/tech-route.pptx
@@ -7,7 +7,7 @@
   <p:sldIdLst>
     <p:sldId id="256" r:id="rId2"/>
   </p:sldIdLst>
-  <p:sldSz cx="12192000" cy="6858000" type="wide"/>
+  <p:sldSz cx="12192000" cy="6858000" type="custom"/>
   <p:notesSz cx="6858000" cy="9144000"/>
 </p:presentation>
 </file>
@@ -87,14 +87,64 @@
       </p:grpSpPr>
       <p:sp>
         <p:nvSpPr>
-          <p:cNvPr id="2" name="Title"/>
-          <p:cNvSpPr/>
-          <p:nvPr/>
-        </p:nvSpPr>
-        <p:spPr>
-          <a:xfrm>
-            <a:off x="1150000" y="1942013"/>
-            <a:ext cx="9892000" cy="360000"/>
+          <p:cNvPr id="2" name="Title Band"/>
+          <p:cNvSpPr/>
+          <p:nvPr/>
+        </p:nvSpPr>
+        <p:spPr>
+          <a:xfrm>
+            <a:off x="2316910" y="330000"/>
+            <a:ext cx="7558178" cy="500000"/>
+          </a:xfrm>
+          <a:prstGeom prst="roundRect">
+            <a:avLst/>
+          </a:prstGeom>
+          <a:solidFill>
+            <a:srgbClr val="DBEAFE"/>
+          </a:solidFill>
+          <a:ln w="12700">
+            <a:solidFill>
+              <a:srgbClr val="93C5FD"/>
+            </a:solidFill>
+          </a:ln>
+        </p:spPr>
+        <p:txBody>
+          <a:bodyPr wrap="square" anchor="ctr"/>
+          <a:lstStyle/>
+          <a:p>
+            <a:pPr algn="ctr"/>
+            <a:r>
+              <a:rPr lang="zh-CN" sz="2100" b="1">
+                <a:solidFill>
+                  <a:srgbClr val="1F2937"/>
+                </a:solidFill>
+              </a:rPr>
+              <a:t>PV Surface Defect Detection Method</a:t>
+            </a:r>
+          </a:p>
+          <a:p>
+            <a:pPr algn="ctr"/>
+            <a:r>
+              <a:rPr lang="zh-CN" sz="2100" b="1">
+                <a:solidFill>
+                  <a:srgbClr val="1F2937"/>
+                </a:solidFill>
+              </a:rPr>
+              <a:t>Route</a:t>
+            </a:r>
+          </a:p>
+        </p:txBody>
+      </p:sp>
+      <p:sp>
+        <p:nvSpPr>
+          <p:cNvPr id="3" name="Subtitle"/>
+          <p:cNvSpPr/>
+          <p:nvPr/>
+        </p:nvSpPr>
+        <p:spPr>
+          <a:xfrm>
+            <a:off x="2316910" y="820000"/>
+            <a:ext cx="7558178" cy="210000"/>
           </a:xfrm>
           <a:prstGeom prst="rect">
             <a:avLst/>
@@ -114,43 +164,43 @@
           <a:p>
             <a:pPr algn="ctr"/>
             <a:r>
-              <a:rPr lang="en-US" sz="2100" b="1">
-                <a:solidFill>
-                  <a:srgbClr val="1F2937"/>
-                </a:solidFill>
-              </a:rPr>
-              <a:t>Sample Project</a:t>
-            </a:r>
-          </a:p>
-          <a:p>
-            <a:pPr algn="ctr"/>
-            <a:r>
-              <a:rPr lang="en-US" sz="2100" b="1">
-                <a:solidFill>
-                  <a:srgbClr val="1F2937"/>
-                </a:solidFill>
-              </a:rPr>
-              <a:t>Technical Route</a:t>
-            </a:r>
-          </a:p>
-        </p:txBody>
-      </p:sp>
-      <p:sp>
-        <p:nvSpPr>
-          <p:cNvPr id="3" name="Stage Objective"/>
-          <p:cNvSpPr/>
-          <p:nvPr/>
-        </p:nvSpPr>
-        <p:spPr>
-          <a:xfrm>
-            <a:off x="696016" y="2919267"/>
-            <a:ext cx="1815923" cy="1640702"/>
-          </a:xfrm>
-          <a:prstGeom prst="roundRect">
-            <a:avLst/>
-          </a:prstGeom>
-          <a:solidFill>
-            <a:srgbClr val="EFF6FF"/>
+              <a:rPr lang="zh-CN" sz="850">
+                <a:solidFill>
+                  <a:srgbClr val="64748B"/>
+                </a:solidFill>
+              </a:rPr>
+              <a:t>Academic method framework demo generated by</a:t>
+            </a:r>
+          </a:p>
+          <a:p>
+            <a:pPr algn="ctr"/>
+            <a:r>
+              <a:rPr lang="zh-CN" sz="850">
+                <a:solidFill>
+                  <a:srgbClr val="64748B"/>
+                </a:solidFill>
+              </a:rPr>
+              <a:t>tech-route-maker</a:t>
+            </a:r>
+          </a:p>
+        </p:txBody>
+      </p:sp>
+      <p:sp>
+        <p:nvSpPr>
+          <p:cNvPr id="4" name="Stage Research Goal"/>
+          <p:cNvSpPr/>
+          <p:nvPr/>
+        </p:nvSpPr>
+        <p:spPr>
+          <a:xfrm>
+            <a:off x="3392836" y="1217917"/>
+            <a:ext cx="6429855" cy="866062"/>
+          </a:xfrm>
+          <a:prstGeom prst="roundRect">
+            <a:avLst/>
+          </a:prstGeom>
+          <a:solidFill>
+            <a:srgbClr val="DBEAFE"/>
           </a:solidFill>
           <a:ln w="12700">
             <a:solidFill>
@@ -164,7 +214,7 @@
           <a:p>
             <a:pPr algn="ctr"/>
             <a:r>
-              <a:rPr lang="en-US" sz="1000">
+              <a:rPr lang="zh-CN" sz="1000">
                 <a:solidFill>
                   <a:srgbClr val="1F2937"/>
                 </a:solidFill>
@@ -176,14 +226,14 @@
       </p:sp>
       <p:sp>
         <p:nvSpPr>
-          <p:cNvPr id="4" name="Header Objective"/>
-          <p:cNvSpPr/>
-          <p:nvPr/>
-        </p:nvSpPr>
-        <p:spPr>
-          <a:xfrm>
-            <a:off x="696016" y="2919267"/>
-            <a:ext cx="1815923" cy="302653"/>
+          <p:cNvPr id="5" name="Label Research Goal"/>
+          <p:cNvSpPr/>
+          <p:nvPr/>
+        </p:nvSpPr>
+        <p:spPr>
+          <a:xfrm>
+            <a:off x="2303697" y="1467238"/>
+            <a:ext cx="839817" cy="367420"/>
           </a:xfrm>
           <a:prstGeom prst="roundRect">
             <a:avLst/>
@@ -203,32 +253,32 @@
           <a:p>
             <a:pPr algn="ctr"/>
             <a:r>
-              <a:rPr lang="en-US" sz="1100" b="1">
+              <a:rPr lang="zh-CN" sz="1050" b="1">
                 <a:solidFill>
                   <a:srgbClr val="FFFFFF"/>
                 </a:solidFill>
               </a:rPr>
-              <a:t>Objective</a:t>
-            </a:r>
-          </a:p>
-        </p:txBody>
-      </p:sp>
-      <p:sp>
-        <p:nvSpPr>
-          <p:cNvPr id="5" name="Stage Input"/>
-          <p:cNvSpPr/>
-          <p:nvPr/>
-        </p:nvSpPr>
-        <p:spPr>
-          <a:xfrm>
-            <a:off x="2942027" y="2919267"/>
-            <a:ext cx="1815923" cy="1640702"/>
-          </a:xfrm>
-          <a:prstGeom prst="roundRect">
-            <a:avLst/>
-          </a:prstGeom>
-          <a:solidFill>
-            <a:srgbClr val="EFF6FF"/>
+              <a:t>Research Goal</a:t>
+            </a:r>
+          </a:p>
+        </p:txBody>
+      </p:sp>
+      <p:sp>
+        <p:nvSpPr>
+          <p:cNvPr id="6" name="Stage Data Evidence"/>
+          <p:cNvSpPr/>
+          <p:nvPr/>
+        </p:nvSpPr>
+        <p:spPr>
+          <a:xfrm>
+            <a:off x="3392836" y="2241445"/>
+            <a:ext cx="6429855" cy="866062"/>
+          </a:xfrm>
+          <a:prstGeom prst="roundRect">
+            <a:avLst/>
+          </a:prstGeom>
+          <a:solidFill>
+            <a:srgbClr val="E0F2FE"/>
           </a:solidFill>
           <a:ln w="12700">
             <a:solidFill>
@@ -242,7 +292,7 @@
           <a:p>
             <a:pPr algn="ctr"/>
             <a:r>
-              <a:rPr lang="en-US" sz="1000">
+              <a:rPr lang="zh-CN" sz="1000">
                 <a:solidFill>
                   <a:srgbClr val="1F2937"/>
                 </a:solidFill>
@@ -254,14 +304,14 @@
       </p:sp>
       <p:sp>
         <p:nvSpPr>
-          <p:cNvPr id="6" name="Header Input"/>
-          <p:cNvSpPr/>
-          <p:nvPr/>
-        </p:nvSpPr>
-        <p:spPr>
-          <a:xfrm>
-            <a:off x="2942027" y="2919267"/>
-            <a:ext cx="1815923" cy="302653"/>
+          <p:cNvPr id="7" name="Label Data Evidence"/>
+          <p:cNvSpPr/>
+          <p:nvPr/>
+        </p:nvSpPr>
+        <p:spPr>
+          <a:xfrm>
+            <a:off x="2303697" y="2490766"/>
+            <a:ext cx="839817" cy="367420"/>
           </a:xfrm>
           <a:prstGeom prst="roundRect">
             <a:avLst/>
@@ -281,32 +331,32 @@
           <a:p>
             <a:pPr algn="ctr"/>
             <a:r>
-              <a:rPr lang="en-US" sz="1100" b="1">
+              <a:rPr lang="zh-CN" sz="1050" b="1">
                 <a:solidFill>
                   <a:srgbClr val="FFFFFF"/>
                 </a:solidFill>
               </a:rPr>
-              <a:t>Input</a:t>
-            </a:r>
-          </a:p>
-        </p:txBody>
-      </p:sp>
-      <p:sp>
-        <p:nvSpPr>
-          <p:cNvPr id="7" name="Stage Method"/>
-          <p:cNvSpPr/>
-          <p:nvPr/>
-        </p:nvSpPr>
-        <p:spPr>
-          <a:xfrm>
-            <a:off x="5188038" y="2919267"/>
-            <a:ext cx="1815923" cy="1640702"/>
-          </a:xfrm>
-          <a:prstGeom prst="roundRect">
-            <a:avLst/>
-          </a:prstGeom>
-          <a:solidFill>
-            <a:srgbClr val="EFF6FF"/>
+              <a:t>Data Evidence</a:t>
+            </a:r>
+          </a:p>
+        </p:txBody>
+      </p:sp>
+      <p:sp>
+        <p:nvSpPr>
+          <p:cNvPr id="8" name="Stage Method Design"/>
+          <p:cNvSpPr/>
+          <p:nvPr/>
+        </p:nvSpPr>
+        <p:spPr>
+          <a:xfrm>
+            <a:off x="3392836" y="3264973"/>
+            <a:ext cx="6429855" cy="866062"/>
+          </a:xfrm>
+          <a:prstGeom prst="roundRect">
+            <a:avLst/>
+          </a:prstGeom>
+          <a:solidFill>
+            <a:srgbClr val="EEF2FF"/>
           </a:solidFill>
           <a:ln w="12700">
             <a:solidFill>
@@ -320,7 +370,7 @@
           <a:p>
             <a:pPr algn="ctr"/>
             <a:r>
-              <a:rPr lang="en-US" sz="1000">
+              <a:rPr lang="zh-CN" sz="1000">
                 <a:solidFill>
                   <a:srgbClr val="1F2937"/>
                 </a:solidFill>
@@ -332,14 +382,14 @@
       </p:sp>
       <p:sp>
         <p:nvSpPr>
-          <p:cNvPr id="8" name="Header Method"/>
-          <p:cNvSpPr/>
-          <p:nvPr/>
-        </p:nvSpPr>
-        <p:spPr>
-          <a:xfrm>
-            <a:off x="5188038" y="2919267"/>
-            <a:ext cx="1815923" cy="302653"/>
+          <p:cNvPr id="9" name="Label Method Design"/>
+          <p:cNvSpPr/>
+          <p:nvPr/>
+        </p:nvSpPr>
+        <p:spPr>
+          <a:xfrm>
+            <a:off x="2303697" y="3514293"/>
+            <a:ext cx="839817" cy="367420"/>
           </a:xfrm>
           <a:prstGeom prst="roundRect">
             <a:avLst/>
@@ -359,32 +409,32 @@
           <a:p>
             <a:pPr algn="ctr"/>
             <a:r>
-              <a:rPr lang="en-US" sz="1100" b="1">
+              <a:rPr lang="zh-CN" sz="1050" b="1">
                 <a:solidFill>
                   <a:srgbClr val="FFFFFF"/>
                 </a:solidFill>
               </a:rPr>
-              <a:t>Method</a:t>
-            </a:r>
-          </a:p>
-        </p:txBody>
-      </p:sp>
-      <p:sp>
-        <p:nvSpPr>
-          <p:cNvPr id="9" name="Stage Validation"/>
-          <p:cNvSpPr/>
-          <p:nvPr/>
-        </p:nvSpPr>
-        <p:spPr>
-          <a:xfrm>
-            <a:off x="7434049" y="2919267"/>
-            <a:ext cx="1815923" cy="1640702"/>
-          </a:xfrm>
-          <a:prstGeom prst="roundRect">
-            <a:avLst/>
-          </a:prstGeom>
-          <a:solidFill>
-            <a:srgbClr val="EFF6FF"/>
+              <a:t>Method Design</a:t>
+            </a:r>
+          </a:p>
+        </p:txBody>
+      </p:sp>
+      <p:sp>
+        <p:nvSpPr>
+          <p:cNvPr id="10" name="Stage Training Validation"/>
+          <p:cNvSpPr/>
+          <p:nvPr/>
+        </p:nvSpPr>
+        <p:spPr>
+          <a:xfrm>
+            <a:off x="3392836" y="4288501"/>
+            <a:ext cx="6429855" cy="866062"/>
+          </a:xfrm>
+          <a:prstGeom prst="roundRect">
+            <a:avLst/>
+          </a:prstGeom>
+          <a:solidFill>
+            <a:srgbClr val="ECFDF5"/>
           </a:solidFill>
           <a:ln w="12700">
             <a:solidFill>
@@ -398,7 +448,7 @@
           <a:p>
             <a:pPr algn="ctr"/>
             <a:r>
-              <a:rPr lang="en-US" sz="1000">
+              <a:rPr lang="zh-CN" sz="1000">
                 <a:solidFill>
                   <a:srgbClr val="1F2937"/>
                 </a:solidFill>
@@ -410,14 +460,14 @@
       </p:sp>
       <p:sp>
         <p:nvSpPr>
-          <p:cNvPr id="10" name="Header Validation"/>
-          <p:cNvSpPr/>
-          <p:nvPr/>
-        </p:nvSpPr>
-        <p:spPr>
-          <a:xfrm>
-            <a:off x="7434049" y="2919267"/>
-            <a:ext cx="1815923" cy="302653"/>
+          <p:cNvPr id="11" name="Label Training Validation"/>
+          <p:cNvSpPr/>
+          <p:nvPr/>
+        </p:nvSpPr>
+        <p:spPr>
+          <a:xfrm>
+            <a:off x="2303697" y="4537821"/>
+            <a:ext cx="839817" cy="367420"/>
           </a:xfrm>
           <a:prstGeom prst="roundRect">
             <a:avLst/>
@@ -437,11 +487,22 @@
           <a:p>
             <a:pPr algn="ctr"/>
             <a:r>
-              <a:rPr lang="en-US" sz="1100" b="1">
+              <a:rPr lang="zh-CN" sz="1050" b="1">
                 <a:solidFill>
                   <a:srgbClr val="FFFFFF"/>
                 </a:solidFill>
               </a:rPr>
+              <a:t>Training</a:t>
+            </a:r>
+          </a:p>
+          <a:p>
+            <a:pPr algn="ctr"/>
+            <a:r>
+              <a:rPr lang="zh-CN" sz="1050" b="1">
+                <a:solidFill>
+                  <a:srgbClr val="FFFFFF"/>
+                </a:solidFill>
+              </a:rPr>
               <a:t>Validation</a:t>
             </a:r>
           </a:p>
@@ -449,20 +510,20 @@
       </p:sp>
       <p:sp>
         <p:nvSpPr>
-          <p:cNvPr id="11" name="Stage Output"/>
-          <p:cNvSpPr/>
-          <p:nvPr/>
-        </p:nvSpPr>
-        <p:spPr>
-          <a:xfrm>
-            <a:off x="9680059" y="2919267"/>
-            <a:ext cx="1815923" cy="1640702"/>
-          </a:xfrm>
-          <a:prstGeom prst="roundRect">
-            <a:avLst/>
-          </a:prstGeom>
-          <a:solidFill>
-            <a:srgbClr val="EFF6FF"/>
+          <p:cNvPr id="12" name="Stage Validation Output"/>
+          <p:cNvSpPr/>
+          <p:nvPr/>
+        </p:nvSpPr>
+        <p:spPr>
+          <a:xfrm>
+            <a:off x="3392836" y="5312028"/>
+            <a:ext cx="6429855" cy="866062"/>
+          </a:xfrm>
+          <a:prstGeom prst="roundRect">
+            <a:avLst/>
+          </a:prstGeom>
+          <a:solidFill>
+            <a:srgbClr val="FFF7ED"/>
           </a:solidFill>
           <a:ln w="12700">
             <a:solidFill>
@@ -476,7 +537,7 @@
           <a:p>
             <a:pPr algn="ctr"/>
             <a:r>
-              <a:rPr lang="en-US" sz="1000">
+              <a:rPr lang="zh-CN" sz="1000">
                 <a:solidFill>
                   <a:srgbClr val="1F2937"/>
                 </a:solidFill>
@@ -488,14 +549,14 @@
       </p:sp>
       <p:sp>
         <p:nvSpPr>
-          <p:cNvPr id="12" name="Header Output"/>
-          <p:cNvSpPr/>
-          <p:nvPr/>
-        </p:nvSpPr>
-        <p:spPr>
-          <a:xfrm>
-            <a:off x="9680059" y="2919267"/>
-            <a:ext cx="1815923" cy="302653"/>
+          <p:cNvPr id="13" name="Label Validation Output"/>
+          <p:cNvSpPr/>
+          <p:nvPr/>
+        </p:nvSpPr>
+        <p:spPr>
+          <a:xfrm>
+            <a:off x="2303697" y="5561349"/>
+            <a:ext cx="839817" cy="367420"/>
           </a:xfrm>
           <a:prstGeom prst="roundRect">
             <a:avLst/>
@@ -515,38 +576,16 @@
           <a:p>
             <a:pPr algn="ctr"/>
             <a:r>
-              <a:rPr lang="en-US" sz="1100" b="1">
+              <a:rPr lang="zh-CN" sz="1050" b="1">
                 <a:solidFill>
                   <a:srgbClr val="FFFFFF"/>
                 </a:solidFill>
               </a:rPr>
-              <a:t>Output</a:t>
-            </a:r>
-          </a:p>
-        </p:txBody>
-      </p:sp>
-      <p:cxnSp>
-        <p:nvCxnSpPr>
-          <p:cNvPr id="13" name="Connector 13"/>
-          <p:cNvCxnSpPr/>
-          <p:nvPr/>
-        </p:nvCxnSpPr>
-        <p:spPr>
-          <a:xfrm>
-            <a:off x="1603978" y="3596256"/>
-            <a:ext cx="2246010" cy="1"/>
-          </a:xfrm>
-          <a:prstGeom prst="line">
-            <a:avLst/>
-          </a:prstGeom>
-          <a:ln w="19050">
-            <a:solidFill>
-              <a:srgbClr val="2563EB"/>
-            </a:solidFill>
-            <a:headEnd type="triangle"/>
-          </a:ln>
-        </p:spPr>
-      </p:cxnSp>
+              <a:t>Validation Output</a:t>
+            </a:r>
+          </a:p>
+        </p:txBody>
+      </p:sp>
       <p:cxnSp>
         <p:nvCxnSpPr>
           <p:cNvPr id="14" name="Connector 14"/>
@@ -555,8 +594,8 @@
         </p:nvCxnSpPr>
         <p:spPr>
           <a:xfrm>
-            <a:off x="3849989" y="3596256"/>
-            <a:ext cx="2246010" cy="1"/>
+            <a:off x="6607763" y="2083979"/>
+            <a:ext cx="1" cy="157465"/>
           </a:xfrm>
           <a:prstGeom prst="line">
             <a:avLst/>
@@ -577,8 +616,8 @@
         </p:nvCxnSpPr>
         <p:spPr>
           <a:xfrm>
-            <a:off x="6096000" y="3596256"/>
-            <a:ext cx="1" cy="589378"/>
+            <a:off x="6607763" y="3107507"/>
+            <a:ext cx="1" cy="157465"/>
           </a:xfrm>
           <a:prstGeom prst="line">
             <a:avLst/>
@@ -598,9 +637,9 @@
           <p:nvPr/>
         </p:nvCxnSpPr>
         <p:spPr>
-          <a:xfrm flipV="1">
-            <a:off x="6096000" y="3596256"/>
-            <a:ext cx="2246010" cy="589378"/>
+          <a:xfrm>
+            <a:off x="6607763" y="4131035"/>
+            <a:ext cx="1" cy="157465"/>
           </a:xfrm>
           <a:prstGeom prst="line">
             <a:avLst/>
@@ -621,8 +660,8 @@
         </p:nvCxnSpPr>
         <p:spPr>
           <a:xfrm>
-            <a:off x="8342010" y="3596256"/>
-            <a:ext cx="2246010" cy="1"/>
+            <a:off x="6607763" y="5154563"/>
+            <a:ext cx="1" cy="157465"/>
           </a:xfrm>
           <a:prstGeom prst="line">
             <a:avLst/>
@@ -637,14 +676,14 @@
       </p:cxnSp>
       <p:sp>
         <p:nvSpPr>
-          <p:cNvPr id="18" name="Node objective_goal"/>
-          <p:cNvSpPr/>
-          <p:nvPr/>
-        </p:nvSpPr>
-        <p:spPr>
-          <a:xfrm>
-            <a:off x="895130" y="3365283"/>
-            <a:ext cx="1417694" cy="461945"/>
+          <p:cNvPr id="18" name="Node goal_task"/>
+          <p:cNvSpPr/>
+          <p:nvPr/>
+        </p:nvSpPr>
+        <p:spPr>
+          <a:xfrm>
+            <a:off x="3629035" y="1427871"/>
+            <a:ext cx="2926240" cy="393664"/>
           </a:xfrm>
           <a:prstGeom prst="roundRect">
             <a:avLst/>
@@ -664,37 +703,37 @@
           <a:p>
             <a:pPr algn="ctr"/>
             <a:r>
-              <a:rPr lang="en-US" sz="1050">
-                <a:solidFill>
-                  <a:srgbClr val="1F2937"/>
-                </a:solidFill>
-              </a:rPr>
-              <a:t>Define project</a:t>
-            </a:r>
-          </a:p>
-          <a:p>
-            <a:pPr algn="ctr"/>
-            <a:r>
-              <a:rPr lang="en-US" sz="1050">
-                <a:solidFill>
-                  <a:srgbClr val="1F2937"/>
-                </a:solidFill>
-              </a:rPr>
-              <a:t>goal</a:t>
-            </a:r>
-          </a:p>
-        </p:txBody>
-      </p:sp>
-      <p:sp>
-        <p:nvSpPr>
-          <p:cNvPr id="19" name="Node input_sources"/>
-          <p:cNvSpPr/>
-          <p:nvPr/>
-        </p:nvSpPr>
-        <p:spPr>
-          <a:xfrm>
-            <a:off x="3141141" y="3365283"/>
-            <a:ext cx="1417694" cy="461945"/>
+              <a:rPr lang="zh-CN" sz="930">
+                <a:solidFill>
+                  <a:srgbClr val="1F2937"/>
+                </a:solidFill>
+              </a:rPr>
+              <a:t>Define</a:t>
+            </a:r>
+          </a:p>
+          <a:p>
+            <a:pPr algn="ctr"/>
+            <a:r>
+              <a:rPr lang="zh-CN" sz="930">
+                <a:solidFill>
+                  <a:srgbClr val="1F2937"/>
+                </a:solidFill>
+              </a:rPr>
+              <a:t>defect task</a:t>
+            </a:r>
+          </a:p>
+        </p:txBody>
+      </p:sp>
+      <p:sp>
+        <p:nvSpPr>
+          <p:cNvPr id="19" name="Node goal_metric"/>
+          <p:cNvSpPr/>
+          <p:nvPr/>
+        </p:nvSpPr>
+        <p:spPr>
+          <a:xfrm>
+            <a:off x="6660252" y="1427871"/>
+            <a:ext cx="2926240" cy="393664"/>
           </a:xfrm>
           <a:prstGeom prst="roundRect">
             <a:avLst/>
@@ -714,37 +753,48 @@
           <a:p>
             <a:pPr algn="ctr"/>
             <a:r>
-              <a:rPr lang="en-US" sz="1050">
-                <a:solidFill>
-                  <a:srgbClr val="1F2937"/>
-                </a:solidFill>
-              </a:rPr>
-              <a:t>Collect source</a:t>
-            </a:r>
-          </a:p>
-          <a:p>
-            <a:pPr algn="ctr"/>
-            <a:r>
-              <a:rPr lang="en-US" sz="1050">
-                <a:solidFill>
-                  <a:srgbClr val="1F2937"/>
-                </a:solidFill>
-              </a:rPr>
-              <a:t>evidence</a:t>
-            </a:r>
-          </a:p>
-        </p:txBody>
-      </p:sp>
-      <p:sp>
-        <p:nvSpPr>
-          <p:cNvPr id="20" name="Node method_extract"/>
-          <p:cNvSpPr/>
-          <p:nvPr/>
-        </p:nvSpPr>
-        <p:spPr>
-          <a:xfrm>
-            <a:off x="5387152" y="3365283"/>
-            <a:ext cx="1417694" cy="461945"/>
+              <a:rPr lang="zh-CN" sz="930">
+                <a:solidFill>
+                  <a:srgbClr val="1F2937"/>
+                </a:solidFill>
+              </a:rPr>
+              <a:t>Set</a:t>
+            </a:r>
+          </a:p>
+          <a:p>
+            <a:pPr algn="ctr"/>
+            <a:r>
+              <a:rPr lang="zh-CN" sz="930">
+                <a:solidFill>
+                  <a:srgbClr val="1F2937"/>
+                </a:solidFill>
+              </a:rPr>
+              <a:t>evaluation</a:t>
+            </a:r>
+          </a:p>
+          <a:p>
+            <a:pPr algn="ctr"/>
+            <a:r>
+              <a:rPr lang="zh-CN" sz="930">
+                <a:solidFill>
+                  <a:srgbClr val="1F2937"/>
+                </a:solidFill>
+              </a:rPr>
+              <a:t>metrics</a:t>
+            </a:r>
+          </a:p>
+        </p:txBody>
+      </p:sp>
+      <p:sp>
+        <p:nvSpPr>
+          <p:cNvPr id="20" name="Node data_collect"/>
+          <p:cNvSpPr/>
+          <p:nvPr/>
+        </p:nvSpPr>
+        <p:spPr>
+          <a:xfrm>
+            <a:off x="3629035" y="2451399"/>
+            <a:ext cx="1915834" cy="393664"/>
           </a:xfrm>
           <a:prstGeom prst="roundRect">
             <a:avLst/>
@@ -764,37 +814,48 @@
           <a:p>
             <a:pPr algn="ctr"/>
             <a:r>
-              <a:rPr lang="en-US" sz="1050">
-                <a:solidFill>
-                  <a:srgbClr val="1F2937"/>
-                </a:solidFill>
-              </a:rPr>
-              <a:t>Extract route</a:t>
-            </a:r>
-          </a:p>
-          <a:p>
-            <a:pPr algn="ctr"/>
-            <a:r>
-              <a:rPr lang="en-US" sz="1050">
-                <a:solidFill>
-                  <a:srgbClr val="1F2937"/>
-                </a:solidFill>
-              </a:rPr>
-              <a:t>stages</a:t>
-            </a:r>
-          </a:p>
-        </p:txBody>
-      </p:sp>
-      <p:sp>
-        <p:nvSpPr>
-          <p:cNvPr id="21" name="Node method_render"/>
-          <p:cNvSpPr/>
-          <p:nvPr/>
-        </p:nvSpPr>
-        <p:spPr>
-          <a:xfrm>
-            <a:off x="5387152" y="3954662"/>
-            <a:ext cx="1417694" cy="461945"/>
+              <a:rPr lang="zh-CN" sz="930">
+                <a:solidFill>
+                  <a:srgbClr val="1F2937"/>
+                </a:solidFill>
+              </a:rPr>
+              <a:t>Collect RGB</a:t>
+            </a:r>
+          </a:p>
+          <a:p>
+            <a:pPr algn="ctr"/>
+            <a:r>
+              <a:rPr lang="zh-CN" sz="930">
+                <a:solidFill>
+                  <a:srgbClr val="1F2937"/>
+                </a:solidFill>
+              </a:rPr>
+              <a:t>and IR</a:t>
+            </a:r>
+          </a:p>
+          <a:p>
+            <a:pPr algn="ctr"/>
+            <a:r>
+              <a:rPr lang="zh-CN" sz="930">
+                <a:solidFill>
+                  <a:srgbClr val="1F2937"/>
+                </a:solidFill>
+              </a:rPr>
+              <a:t>images</a:t>
+            </a:r>
+          </a:p>
+        </p:txBody>
+      </p:sp>
+      <p:sp>
+        <p:nvSpPr>
+          <p:cNvPr id="21" name="Node data_align"/>
+          <p:cNvSpPr/>
+          <p:nvPr/>
+        </p:nvSpPr>
+        <p:spPr>
+          <a:xfrm>
+            <a:off x="5649846" y="2451399"/>
+            <a:ext cx="1915834" cy="393664"/>
           </a:xfrm>
           <a:prstGeom prst="roundRect">
             <a:avLst/>
@@ -814,37 +875,48 @@
           <a:p>
             <a:pPr algn="ctr"/>
             <a:r>
-              <a:rPr lang="en-US" sz="1050">
-                <a:solidFill>
-                  <a:srgbClr val="1F2937"/>
-                </a:solidFill>
-              </a:rPr>
-              <a:t>Render editable</a:t>
-            </a:r>
-          </a:p>
-          <a:p>
-            <a:pPr algn="ctr"/>
-            <a:r>
-              <a:rPr lang="en-US" sz="1050">
-                <a:solidFill>
-                  <a:srgbClr val="1F2937"/>
-                </a:solidFill>
-              </a:rPr>
-              <a:t>files</a:t>
-            </a:r>
-          </a:p>
-        </p:txBody>
-      </p:sp>
-      <p:sp>
-        <p:nvSpPr>
-          <p:cNvPr id="22" name="Node validation_check"/>
-          <p:cNvSpPr/>
-          <p:nvPr/>
-        </p:nvSpPr>
-        <p:spPr>
-          <a:xfrm>
-            <a:off x="7633163" y="3365283"/>
-            <a:ext cx="1417694" cy="461945"/>
+              <a:rPr lang="zh-CN" sz="930">
+                <a:solidFill>
+                  <a:srgbClr val="1F2937"/>
+                </a:solidFill>
+              </a:rPr>
+              <a:t>Align and</a:t>
+            </a:r>
+          </a:p>
+          <a:p>
+            <a:pPr algn="ctr"/>
+            <a:r>
+              <a:rPr lang="zh-CN" sz="930">
+                <a:solidFill>
+                  <a:srgbClr val="1F2937"/>
+                </a:solidFill>
+              </a:rPr>
+              <a:t>annotate</a:t>
+            </a:r>
+          </a:p>
+          <a:p>
+            <a:pPr algn="ctr"/>
+            <a:r>
+              <a:rPr lang="zh-CN" sz="930">
+                <a:solidFill>
+                  <a:srgbClr val="1F2937"/>
+                </a:solidFill>
+              </a:rPr>
+              <a:t>defects</a:t>
+            </a:r>
+          </a:p>
+        </p:txBody>
+      </p:sp>
+      <p:sp>
+        <p:nvSpPr>
+          <p:cNvPr id="22" name="Node data_split"/>
+          <p:cNvSpPr/>
+          <p:nvPr/>
+        </p:nvSpPr>
+        <p:spPr>
+          <a:xfrm>
+            <a:off x="7670658" y="2451399"/>
+            <a:ext cx="1915834" cy="393664"/>
           </a:xfrm>
           <a:prstGeom prst="roundRect">
             <a:avLst/>
@@ -864,37 +936,48 @@
           <a:p>
             <a:pPr algn="ctr"/>
             <a:r>
-              <a:rPr lang="en-US" sz="1050">
-                <a:solidFill>
-                  <a:srgbClr val="1F2937"/>
-                </a:solidFill>
-              </a:rPr>
-              <a:t>Check route</a:t>
-            </a:r>
-          </a:p>
-          <a:p>
-            <a:pPr algn="ctr"/>
-            <a:r>
-              <a:rPr lang="en-US" sz="1050">
-                <a:solidFill>
-                  <a:srgbClr val="1F2937"/>
-                </a:solidFill>
-              </a:rPr>
-              <a:t>quality</a:t>
-            </a:r>
-          </a:p>
-        </p:txBody>
-      </p:sp>
-      <p:sp>
-        <p:nvSpPr>
-          <p:cNvPr id="23" name="Node output_files"/>
-          <p:cNvSpPr/>
-          <p:nvPr/>
-        </p:nvSpPr>
-        <p:spPr>
-          <a:xfrm>
-            <a:off x="9879174" y="3365283"/>
-            <a:ext cx="1417694" cy="461945"/>
+              <a:rPr lang="zh-CN" sz="930">
+                <a:solidFill>
+                  <a:srgbClr val="1F2937"/>
+                </a:solidFill>
+              </a:rPr>
+              <a:t>Prepare</a:t>
+            </a:r>
+          </a:p>
+          <a:p>
+            <a:pPr algn="ctr"/>
+            <a:r>
+              <a:rPr lang="zh-CN" sz="930">
+                <a:solidFill>
+                  <a:srgbClr val="1F2937"/>
+                </a:solidFill>
+              </a:rPr>
+              <a:t>train test</a:t>
+            </a:r>
+          </a:p>
+          <a:p>
+            <a:pPr algn="ctr"/>
+            <a:r>
+              <a:rPr lang="zh-CN" sz="930">
+                <a:solidFill>
+                  <a:srgbClr val="1F2937"/>
+                </a:solidFill>
+              </a:rPr>
+              <a:t>sets</a:t>
+            </a:r>
+          </a:p>
+        </p:txBody>
+      </p:sp>
+      <p:sp>
+        <p:nvSpPr>
+          <p:cNvPr id="23" name="Node method_baseline"/>
+          <p:cNvSpPr/>
+          <p:nvPr/>
+        </p:nvSpPr>
+        <p:spPr>
+          <a:xfrm>
+            <a:off x="3629035" y="3474927"/>
+            <a:ext cx="1915834" cy="393664"/>
           </a:xfrm>
           <a:prstGeom prst="roundRect">
             <a:avLst/>
@@ -914,23 +997,489 @@
           <a:p>
             <a:pPr algn="ctr"/>
             <a:r>
-              <a:rPr lang="en-US" sz="1050">
-                <a:solidFill>
-                  <a:srgbClr val="1F2937"/>
-                </a:solidFill>
-              </a:rPr>
-              <a:t>Deliver editable</a:t>
-            </a:r>
-          </a:p>
-          <a:p>
-            <a:pPr algn="ctr"/>
-            <a:r>
-              <a:rPr lang="en-US" sz="1050">
-                <a:solidFill>
-                  <a:srgbClr val="1F2937"/>
-                </a:solidFill>
-              </a:rPr>
-              <a:t>diagrams</a:t>
+              <a:rPr lang="zh-CN" sz="930">
+                <a:solidFill>
+                  <a:srgbClr val="1F2937"/>
+                </a:solidFill>
+              </a:rPr>
+              <a:t>Build</a:t>
+            </a:r>
+          </a:p>
+          <a:p>
+            <a:pPr algn="ctr"/>
+            <a:r>
+              <a:rPr lang="zh-CN" sz="930">
+                <a:solidFill>
+                  <a:srgbClr val="1F2937"/>
+                </a:solidFill>
+              </a:rPr>
+              <a:t>baseline</a:t>
+            </a:r>
+          </a:p>
+          <a:p>
+            <a:pPr algn="ctr"/>
+            <a:r>
+              <a:rPr lang="zh-CN" sz="930">
+                <a:solidFill>
+                  <a:srgbClr val="1F2937"/>
+                </a:solidFill>
+              </a:rPr>
+              <a:t>detector</a:t>
+            </a:r>
+          </a:p>
+        </p:txBody>
+      </p:sp>
+      <p:sp>
+        <p:nvSpPr>
+          <p:cNvPr id="24" name="Node method_fusion"/>
+          <p:cNvSpPr/>
+          <p:nvPr/>
+        </p:nvSpPr>
+        <p:spPr>
+          <a:xfrm>
+            <a:off x="5649846" y="3474927"/>
+            <a:ext cx="1915834" cy="393664"/>
+          </a:xfrm>
+          <a:prstGeom prst="roundRect">
+            <a:avLst/>
+          </a:prstGeom>
+          <a:solidFill>
+            <a:srgbClr val="FFFFFF"/>
+          </a:solidFill>
+          <a:ln w="12700">
+            <a:solidFill>
+              <a:srgbClr val="60A5FA"/>
+            </a:solidFill>
+          </a:ln>
+        </p:spPr>
+        <p:txBody>
+          <a:bodyPr wrap="square" anchor="ctr"/>
+          <a:lstStyle/>
+          <a:p>
+            <a:pPr algn="ctr"/>
+            <a:r>
+              <a:rPr lang="zh-CN" sz="930">
+                <a:solidFill>
+                  <a:srgbClr val="1F2937"/>
+                </a:solidFill>
+              </a:rPr>
+              <a:t>Fuse</a:t>
+            </a:r>
+          </a:p>
+          <a:p>
+            <a:pPr algn="ctr"/>
+            <a:r>
+              <a:rPr lang="zh-CN" sz="930">
+                <a:solidFill>
+                  <a:srgbClr val="1F2937"/>
+                </a:solidFill>
+              </a:rPr>
+              <a:t>multimodal</a:t>
+            </a:r>
+          </a:p>
+          <a:p>
+            <a:pPr algn="ctr"/>
+            <a:r>
+              <a:rPr lang="zh-CN" sz="930">
+                <a:solidFill>
+                  <a:srgbClr val="1F2937"/>
+                </a:solidFill>
+              </a:rPr>
+              <a:t>features</a:t>
+            </a:r>
+          </a:p>
+        </p:txBody>
+      </p:sp>
+      <p:sp>
+        <p:nvSpPr>
+          <p:cNvPr id="25" name="Node method_attention"/>
+          <p:cNvSpPr/>
+          <p:nvPr/>
+        </p:nvSpPr>
+        <p:spPr>
+          <a:xfrm>
+            <a:off x="7670658" y="3474927"/>
+            <a:ext cx="1915834" cy="393664"/>
+          </a:xfrm>
+          <a:prstGeom prst="roundRect">
+            <a:avLst/>
+          </a:prstGeom>
+          <a:solidFill>
+            <a:srgbClr val="FFFFFF"/>
+          </a:solidFill>
+          <a:ln w="12700">
+            <a:solidFill>
+              <a:srgbClr val="60A5FA"/>
+            </a:solidFill>
+          </a:ln>
+        </p:spPr>
+        <p:txBody>
+          <a:bodyPr wrap="square" anchor="ctr"/>
+          <a:lstStyle/>
+          <a:p>
+            <a:pPr algn="ctr"/>
+            <a:r>
+              <a:rPr lang="zh-CN" sz="930">
+                <a:solidFill>
+                  <a:srgbClr val="1F2937"/>
+                </a:solidFill>
+              </a:rPr>
+              <a:t>Enhance weak</a:t>
+            </a:r>
+          </a:p>
+          <a:p>
+            <a:pPr algn="ctr"/>
+            <a:r>
+              <a:rPr lang="zh-CN" sz="930">
+                <a:solidFill>
+                  <a:srgbClr val="1F2937"/>
+                </a:solidFill>
+              </a:rPr>
+              <a:t>regions</a:t>
+            </a:r>
+          </a:p>
+        </p:txBody>
+      </p:sp>
+      <p:sp>
+        <p:nvSpPr>
+          <p:cNvPr id="26" name="Node training_loss"/>
+          <p:cNvSpPr/>
+          <p:nvPr/>
+        </p:nvSpPr>
+        <p:spPr>
+          <a:xfrm>
+            <a:off x="3629035" y="4498455"/>
+            <a:ext cx="1915834" cy="393664"/>
+          </a:xfrm>
+          <a:prstGeom prst="roundRect">
+            <a:avLst/>
+          </a:prstGeom>
+          <a:solidFill>
+            <a:srgbClr val="FFFFFF"/>
+          </a:solidFill>
+          <a:ln w="12700">
+            <a:solidFill>
+              <a:srgbClr val="60A5FA"/>
+            </a:solidFill>
+          </a:ln>
+        </p:spPr>
+        <p:txBody>
+          <a:bodyPr wrap="square" anchor="ctr"/>
+          <a:lstStyle/>
+          <a:p>
+            <a:pPr algn="ctr"/>
+            <a:r>
+              <a:rPr lang="zh-CN" sz="930">
+                <a:solidFill>
+                  <a:srgbClr val="1F2937"/>
+                </a:solidFill>
+              </a:rPr>
+              <a:t>Optimize</a:t>
+            </a:r>
+          </a:p>
+          <a:p>
+            <a:pPr algn="ctr"/>
+            <a:r>
+              <a:rPr lang="zh-CN" sz="930">
+                <a:solidFill>
+                  <a:srgbClr val="1F2937"/>
+                </a:solidFill>
+              </a:rPr>
+              <a:t>detection</a:t>
+            </a:r>
+          </a:p>
+          <a:p>
+            <a:pPr algn="ctr"/>
+            <a:r>
+              <a:rPr lang="zh-CN" sz="930">
+                <a:solidFill>
+                  <a:srgbClr val="1F2937"/>
+                </a:solidFill>
+              </a:rPr>
+              <a:t>losses</a:t>
+            </a:r>
+          </a:p>
+        </p:txBody>
+      </p:sp>
+      <p:sp>
+        <p:nvSpPr>
+          <p:cNvPr id="27" name="Node training_ablation"/>
+          <p:cNvSpPr/>
+          <p:nvPr/>
+        </p:nvSpPr>
+        <p:spPr>
+          <a:xfrm>
+            <a:off x="5649846" y="4498455"/>
+            <a:ext cx="1915834" cy="393664"/>
+          </a:xfrm>
+          <a:prstGeom prst="roundRect">
+            <a:avLst/>
+          </a:prstGeom>
+          <a:solidFill>
+            <a:srgbClr val="FFFFFF"/>
+          </a:solidFill>
+          <a:ln w="12700">
+            <a:solidFill>
+              <a:srgbClr val="60A5FA"/>
+            </a:solidFill>
+          </a:ln>
+        </p:spPr>
+        <p:txBody>
+          <a:bodyPr wrap="square" anchor="ctr"/>
+          <a:lstStyle/>
+          <a:p>
+            <a:pPr algn="ctr"/>
+            <a:r>
+              <a:rPr lang="zh-CN" sz="930">
+                <a:solidFill>
+                  <a:srgbClr val="1F2937"/>
+                </a:solidFill>
+              </a:rPr>
+              <a:t>Run ablation</a:t>
+            </a:r>
+          </a:p>
+          <a:p>
+            <a:pPr algn="ctr"/>
+            <a:r>
+              <a:rPr lang="zh-CN" sz="930">
+                <a:solidFill>
+                  <a:srgbClr val="1F2937"/>
+                </a:solidFill>
+              </a:rPr>
+              <a:t>studies</a:t>
+            </a:r>
+          </a:p>
+        </p:txBody>
+      </p:sp>
+      <p:sp>
+        <p:nvSpPr>
+          <p:cNvPr id="28" name="Node training_infer"/>
+          <p:cNvSpPr/>
+          <p:nvPr/>
+        </p:nvSpPr>
+        <p:spPr>
+          <a:xfrm>
+            <a:off x="7670658" y="4498455"/>
+            <a:ext cx="1915834" cy="393664"/>
+          </a:xfrm>
+          <a:prstGeom prst="roundRect">
+            <a:avLst/>
+          </a:prstGeom>
+          <a:solidFill>
+            <a:srgbClr val="FFFFFF"/>
+          </a:solidFill>
+          <a:ln w="12700">
+            <a:solidFill>
+              <a:srgbClr val="60A5FA"/>
+            </a:solidFill>
+          </a:ln>
+        </p:spPr>
+        <p:txBody>
+          <a:bodyPr wrap="square" anchor="ctr"/>
+          <a:lstStyle/>
+          <a:p>
+            <a:pPr algn="ctr"/>
+            <a:r>
+              <a:rPr lang="zh-CN" sz="930">
+                <a:solidFill>
+                  <a:srgbClr val="1F2937"/>
+                </a:solidFill>
+              </a:rPr>
+              <a:t>Infer defect</a:t>
+            </a:r>
+          </a:p>
+          <a:p>
+            <a:pPr algn="ctr"/>
+            <a:r>
+              <a:rPr lang="zh-CN" sz="930">
+                <a:solidFill>
+                  <a:srgbClr val="1F2937"/>
+                </a:solidFill>
+              </a:rPr>
+              <a:t>candidates</a:t>
+            </a:r>
+          </a:p>
+        </p:txBody>
+      </p:sp>
+      <p:sp>
+        <p:nvSpPr>
+          <p:cNvPr id="29" name="Node output_metrics"/>
+          <p:cNvSpPr/>
+          <p:nvPr/>
+        </p:nvSpPr>
+        <p:spPr>
+          <a:xfrm>
+            <a:off x="3629035" y="5521983"/>
+            <a:ext cx="1915834" cy="393664"/>
+          </a:xfrm>
+          <a:prstGeom prst="roundRect">
+            <a:avLst/>
+          </a:prstGeom>
+          <a:solidFill>
+            <a:srgbClr val="FFFFFF"/>
+          </a:solidFill>
+          <a:ln w="12700">
+            <a:solidFill>
+              <a:srgbClr val="60A5FA"/>
+            </a:solidFill>
+          </a:ln>
+        </p:spPr>
+        <p:txBody>
+          <a:bodyPr wrap="square" anchor="ctr"/>
+          <a:lstStyle/>
+          <a:p>
+            <a:pPr algn="ctr"/>
+            <a:r>
+              <a:rPr lang="zh-CN" sz="930">
+                <a:solidFill>
+                  <a:srgbClr val="1F2937"/>
+                </a:solidFill>
+              </a:rPr>
+              <a:t>Report</a:t>
+            </a:r>
+          </a:p>
+          <a:p>
+            <a:pPr algn="ctr"/>
+            <a:r>
+              <a:rPr lang="zh-CN" sz="930">
+                <a:solidFill>
+                  <a:srgbClr val="1F2937"/>
+                </a:solidFill>
+              </a:rPr>
+              <a:t>quantitative</a:t>
+            </a:r>
+          </a:p>
+          <a:p>
+            <a:pPr algn="ctr"/>
+            <a:r>
+              <a:rPr lang="zh-CN" sz="930">
+                <a:solidFill>
+                  <a:srgbClr val="1F2937"/>
+                </a:solidFill>
+              </a:rPr>
+              <a:t>gains</a:t>
+            </a:r>
+          </a:p>
+        </p:txBody>
+      </p:sp>
+      <p:sp>
+        <p:nvSpPr>
+          <p:cNvPr id="30" name="Node output_visual"/>
+          <p:cNvSpPr/>
+          <p:nvPr/>
+        </p:nvSpPr>
+        <p:spPr>
+          <a:xfrm>
+            <a:off x="5649846" y="5521983"/>
+            <a:ext cx="1915834" cy="393664"/>
+          </a:xfrm>
+          <a:prstGeom prst="roundRect">
+            <a:avLst/>
+          </a:prstGeom>
+          <a:solidFill>
+            <a:srgbClr val="FFFFFF"/>
+          </a:solidFill>
+          <a:ln w="12700">
+            <a:solidFill>
+              <a:srgbClr val="60A5FA"/>
+            </a:solidFill>
+          </a:ln>
+        </p:spPr>
+        <p:txBody>
+          <a:bodyPr wrap="square" anchor="ctr"/>
+          <a:lstStyle/>
+          <a:p>
+            <a:pPr algn="ctr"/>
+            <a:r>
+              <a:rPr lang="zh-CN" sz="930">
+                <a:solidFill>
+                  <a:srgbClr val="1F2937"/>
+                </a:solidFill>
+              </a:rPr>
+              <a:t>Explain</a:t>
+            </a:r>
+          </a:p>
+          <a:p>
+            <a:pPr algn="ctr"/>
+            <a:r>
+              <a:rPr lang="zh-CN" sz="930">
+                <a:solidFill>
+                  <a:srgbClr val="1F2937"/>
+                </a:solidFill>
+              </a:rPr>
+              <a:t>visual</a:t>
+            </a:r>
+          </a:p>
+          <a:p>
+            <a:pPr algn="ctr"/>
+            <a:r>
+              <a:rPr lang="zh-CN" sz="930">
+                <a:solidFill>
+                  <a:srgbClr val="1F2937"/>
+                </a:solidFill>
+              </a:rPr>
+              <a:t>results</a:t>
+            </a:r>
+          </a:p>
+        </p:txBody>
+      </p:sp>
+      <p:sp>
+        <p:nvSpPr>
+          <p:cNvPr id="31" name="Node output_report"/>
+          <p:cNvSpPr/>
+          <p:nvPr/>
+        </p:nvSpPr>
+        <p:spPr>
+          <a:xfrm>
+            <a:off x="7670658" y="5521983"/>
+            <a:ext cx="1915834" cy="393664"/>
+          </a:xfrm>
+          <a:prstGeom prst="roundRect">
+            <a:avLst/>
+          </a:prstGeom>
+          <a:solidFill>
+            <a:srgbClr val="FFFFFF"/>
+          </a:solidFill>
+          <a:ln w="12700">
+            <a:solidFill>
+              <a:srgbClr val="60A5FA"/>
+            </a:solidFill>
+          </a:ln>
+        </p:spPr>
+        <p:txBody>
+          <a:bodyPr wrap="square" anchor="ctr"/>
+          <a:lstStyle/>
+          <a:p>
+            <a:pPr algn="ctr"/>
+            <a:r>
+              <a:rPr lang="zh-CN" sz="930">
+                <a:solidFill>
+                  <a:srgbClr val="1F2937"/>
+                </a:solidFill>
+              </a:rPr>
+              <a:t>Generate</a:t>
+            </a:r>
+          </a:p>
+          <a:p>
+            <a:pPr algn="ctr"/>
+            <a:r>
+              <a:rPr lang="zh-CN" sz="930">
+                <a:solidFill>
+                  <a:srgbClr val="1F2937"/>
+                </a:solidFill>
+              </a:rPr>
+              <a:t>defect</a:t>
+            </a:r>
+          </a:p>
+          <a:p>
+            <a:pPr algn="ctr"/>
+            <a:r>
+              <a:rPr lang="zh-CN" sz="930">
+                <a:solidFill>
+                  <a:srgbClr val="1F2937"/>
+                </a:solidFill>
+              </a:rPr>
+              <a:t>report</a:t>
             </a:r>
           </a:p>
         </p:txBody>
